--- a/Trabalho_2/ANADI_TP2_Apresentacao.pptx
+++ b/Trabalho_2/ANADI_TP2_Apresentacao.pptx
@@ -4819,7 +4819,7 @@
         </p:nvSpPr>
         <p:spPr>
           <a:xfrm>
-            <a:off x="4617720" y="868680"/>
+            <a:off x="4709160" y="804672"/>
             <a:ext cx="8229600" cy="292608"/>
           </a:xfrm>
           <a:prstGeom prst="rect">
@@ -4858,7 +4858,7 @@
         </p:nvSpPr>
         <p:spPr>
           <a:xfrm>
-            <a:off x="4617720" y="1143000"/>
+            <a:off x="4639176" y="1143000"/>
             <a:ext cx="4114800" cy="2788920"/>
           </a:xfrm>
           <a:prstGeom prst="roundRect">
@@ -4892,7 +4892,7 @@
         </p:nvSpPr>
         <p:spPr>
           <a:xfrm>
-            <a:off x="4709160" y="1261872"/>
+            <a:off x="4706352" y="1277874"/>
             <a:ext cx="1691640" cy="292608"/>
           </a:xfrm>
           <a:prstGeom prst="rect">
@@ -4931,7 +4931,7 @@
         </p:nvSpPr>
         <p:spPr>
           <a:xfrm>
-            <a:off x="6446520" y="1298448"/>
+            <a:off x="5851570" y="1312794"/>
             <a:ext cx="2355494" cy="201168"/>
           </a:xfrm>
           <a:prstGeom prst="rect">
@@ -4956,7 +4956,7 @@
         </p:nvSpPr>
         <p:spPr>
           <a:xfrm>
-            <a:off x="8847734" y="1261872"/>
+            <a:off x="8339184" y="1267074"/>
             <a:ext cx="640080" cy="292608"/>
           </a:xfrm>
           <a:prstGeom prst="rect">
@@ -5034,7 +5034,7 @@
         </p:nvSpPr>
         <p:spPr>
           <a:xfrm>
-            <a:off x="6446520" y="1691640"/>
+            <a:off x="5851570" y="1705986"/>
             <a:ext cx="1536192" cy="201168"/>
           </a:xfrm>
           <a:prstGeom prst="rect">
@@ -5059,7 +5059,7 @@
         </p:nvSpPr>
         <p:spPr>
           <a:xfrm>
-            <a:off x="8028432" y="1655064"/>
+            <a:off x="7433482" y="1669410"/>
             <a:ext cx="640080" cy="292608"/>
           </a:xfrm>
           <a:prstGeom prst="rect">
@@ -5137,7 +5137,7 @@
         </p:nvSpPr>
         <p:spPr>
           <a:xfrm>
-            <a:off x="6446520" y="2084832"/>
+            <a:off x="5851570" y="2099178"/>
             <a:ext cx="1331366" cy="201168"/>
           </a:xfrm>
           <a:prstGeom prst="rect">
@@ -5162,7 +5162,7 @@
         </p:nvSpPr>
         <p:spPr>
           <a:xfrm>
-            <a:off x="7823606" y="2048256"/>
+            <a:off x="7228656" y="2062602"/>
             <a:ext cx="640080" cy="292608"/>
           </a:xfrm>
           <a:prstGeom prst="rect">
@@ -5240,7 +5240,7 @@
         </p:nvSpPr>
         <p:spPr>
           <a:xfrm>
-            <a:off x="6446520" y="2478024"/>
+            <a:off x="5851570" y="2492370"/>
             <a:ext cx="998525" cy="201168"/>
           </a:xfrm>
           <a:prstGeom prst="rect">
@@ -5265,7 +5265,7 @@
         </p:nvSpPr>
         <p:spPr>
           <a:xfrm>
-            <a:off x="7490765" y="2441448"/>
+            <a:off x="6895815" y="2455794"/>
             <a:ext cx="640080" cy="292608"/>
           </a:xfrm>
           <a:prstGeom prst="rect">
@@ -5343,7 +5343,7 @@
         </p:nvSpPr>
         <p:spPr>
           <a:xfrm>
-            <a:off x="6446520" y="2871216"/>
+            <a:off x="5851570" y="2885562"/>
             <a:ext cx="332842" cy="201168"/>
           </a:xfrm>
           <a:prstGeom prst="rect">
@@ -5368,7 +5368,7 @@
         </p:nvSpPr>
         <p:spPr>
           <a:xfrm>
-            <a:off x="6825082" y="2834640"/>
+            <a:off x="6230132" y="2848986"/>
             <a:ext cx="640080" cy="292608"/>
           </a:xfrm>
           <a:prstGeom prst="rect">
@@ -5446,7 +5446,7 @@
         </p:nvSpPr>
         <p:spPr>
           <a:xfrm>
-            <a:off x="6446520" y="3264408"/>
+            <a:off x="5851570" y="3278754"/>
             <a:ext cx="665683" cy="201168"/>
           </a:xfrm>
           <a:prstGeom prst="rect">
@@ -5471,7 +5471,7 @@
         </p:nvSpPr>
         <p:spPr>
           <a:xfrm>
-            <a:off x="7157923" y="3227832"/>
+            <a:off x="6562973" y="3242178"/>
             <a:ext cx="640080" cy="292608"/>
           </a:xfrm>
           <a:prstGeom prst="rect">
